--- a/0B. CellModels&Electophys.pptx
+++ b/0B. CellModels&Electophys.pptx
@@ -123,7 +123,7 @@
 <file path=ppt/revisionInfo.xml><?xml version="1.0" encoding="utf-8"?>
 <p1510:revInfo xmlns:a="http://schemas.openxmlformats.org/drawingml/2006/main" xmlns:r="http://schemas.openxmlformats.org/officeDocument/2006/relationships" xmlns:p1510="http://schemas.microsoft.com/office/powerpoint/2015/10/main">
   <p1510:revLst>
-    <p1510:client id="{17E6DECB-E45C-4C8C-8399-AD55781C8EC7}" v="21" dt="2026-03-23T05:47:33.922"/>
+    <p1510:client id="{17E6DECB-E45C-4C8C-8399-AD55781C8EC7}" v="22" dt="2026-03-23T18:12:27.889"/>
     <p1510:client id="{3CF760C2-3403-4A39-888D-D121F39DCDF2}" v="15" dt="2026-03-23T00:35:18.500"/>
   </p1510:revLst>
 </p1510:revInfo>
@@ -134,7 +134,7 @@
   <pc:docChgLst>
     <pc:chgData name="Nair, Satish" userId="af50c098-07d3-4545-ad93-15c24b849386" providerId="ADAL" clId="{B575728E-D61F-49E0-BC8E-8DC5242C7AE2}"/>
     <pc:docChg chg="undo redo custSel addSld delSld modSld sldOrd">
-      <pc:chgData name="Nair, Satish" userId="af50c098-07d3-4545-ad93-15c24b849386" providerId="ADAL" clId="{B575728E-D61F-49E0-BC8E-8DC5242C7AE2}" dt="2026-03-23T05:49:35.555" v="1308" actId="1076"/>
+      <pc:chgData name="Nair, Satish" userId="af50c098-07d3-4545-ad93-15c24b849386" providerId="ADAL" clId="{B575728E-D61F-49E0-BC8E-8DC5242C7AE2}" dt="2026-03-23T18:12:27.889" v="1309"/>
       <pc:docMkLst>
         <pc:docMk/>
       </pc:docMkLst>
@@ -262,7 +262,7 @@
         </pc:picChg>
       </pc:sldChg>
       <pc:sldChg chg="addSp delSp modSp add mod ord">
-        <pc:chgData name="Nair, Satish" userId="af50c098-07d3-4545-ad93-15c24b849386" providerId="ADAL" clId="{B575728E-D61F-49E0-BC8E-8DC5242C7AE2}" dt="2026-03-23T05:47:33.922" v="1282"/>
+        <pc:chgData name="Nair, Satish" userId="af50c098-07d3-4545-ad93-15c24b849386" providerId="ADAL" clId="{B575728E-D61F-49E0-BC8E-8DC5242C7AE2}" dt="2026-03-23T18:12:27.889" v="1309"/>
         <pc:sldMkLst>
           <pc:docMk/>
           <pc:sldMk cId="2936881161" sldId="264"/>
@@ -276,7 +276,7 @@
           </ac:spMkLst>
         </pc:spChg>
         <pc:spChg chg="mod">
-          <ac:chgData name="Nair, Satish" userId="af50c098-07d3-4545-ad93-15c24b849386" providerId="ADAL" clId="{B575728E-D61F-49E0-BC8E-8DC5242C7AE2}" dt="2026-03-23T05:47:33.922" v="1282"/>
+          <ac:chgData name="Nair, Satish" userId="af50c098-07d3-4545-ad93-15c24b849386" providerId="ADAL" clId="{B575728E-D61F-49E0-BC8E-8DC5242C7AE2}" dt="2026-03-23T18:12:27.889" v="1309"/>
           <ac:spMkLst>
             <pc:docMk/>
             <pc:sldMk cId="2936881161" sldId="264"/>
@@ -4252,18 +4252,24 @@
               <a:t>: Click on the following link - </a:t>
             </a:r>
             <a:r>
-              <a:rPr lang="en-US" altLang="en-US" dirty="0" err="1">
+              <a:rPr lang="en-US" u="sng">
+                <a:hlinkClick r:id="rId2"/>
+              </a:rPr>
+              <a:t>Colab_B</a:t>
+            </a:r>
+            <a:r>
+              <a:rPr lang="en-US" altLang="en-US">
                 <a:ea typeface="Times New Roman" panose="02020603050405020304" pitchFamily="18" charset="0"/>
                 <a:cs typeface="Times New Roman" panose="02020603050405020304" pitchFamily="18" charset="0"/>
               </a:rPr>
-              <a:t>Colab_A</a:t>
+              <a:t> </a:t>
             </a:r>
             <a:r>
               <a:rPr lang="en-US" altLang="en-US" dirty="0">
                 <a:ea typeface="Times New Roman" panose="02020603050405020304" pitchFamily="18" charset="0"/>
                 <a:cs typeface="Times New Roman" panose="02020603050405020304" pitchFamily="18" charset="0"/>
               </a:rPr>
-              <a:t> and complete the sequentially ar</a:t>
+              <a:t>and complete the sequentially ar</a:t>
             </a:r>
             <a:r>
               <a:rPr lang="en-US" altLang="en-US" dirty="0">
@@ -4956,8 +4962,8 @@
           <a:chExt cx="0" cy="0"/>
         </a:xfrm>
       </p:grpSpPr>
-      <mc:AlternateContent xmlns:mc="http://schemas.openxmlformats.org/markup-compatibility/2006">
-        <mc:Choice xmlns:a14="http://schemas.microsoft.com/office/drawing/2010/main" Requires="a14">
+      <mc:AlternateContent xmlns:mc="http://schemas.openxmlformats.org/markup-compatibility/2006" xmlns:a14="http://schemas.microsoft.com/office/drawing/2010/main">
+        <mc:Choice Requires="a14">
           <p:sp>
             <p:nvSpPr>
               <p:cNvPr id="4" name="TextBox 3">
@@ -5144,7 +5150,7 @@
             </p:txBody>
           </p:sp>
         </mc:Choice>
-        <mc:Fallback>
+        <mc:Fallback xmlns="">
           <p:sp>
             <p:nvSpPr>
               <p:cNvPr id="4" name="TextBox 3">
@@ -5225,8 +5231,8 @@
           <a:chExt cx="0" cy="0"/>
         </a:xfrm>
       </p:grpSpPr>
-      <mc:AlternateContent xmlns:mc="http://schemas.openxmlformats.org/markup-compatibility/2006">
-        <mc:Choice xmlns:a14="http://schemas.microsoft.com/office/drawing/2010/main" Requires="a14">
+      <mc:AlternateContent xmlns:mc="http://schemas.openxmlformats.org/markup-compatibility/2006" xmlns:a14="http://schemas.microsoft.com/office/drawing/2010/main">
+        <mc:Choice Requires="a14">
           <p:sp>
             <p:nvSpPr>
               <p:cNvPr id="4" name="TextBox 3">
@@ -5556,7 +5562,7 @@
             </p:txBody>
           </p:sp>
         </mc:Choice>
-        <mc:Fallback>
+        <mc:Fallback xmlns="">
           <p:sp>
             <p:nvSpPr>
               <p:cNvPr id="4" name="TextBox 3">
